--- a/presentations/PR_L08_SeatingPlanHall_Lesson.pptx
+++ b/presentations/PR_L08_SeatingPlanHall_Lesson.pptx
@@ -2617,7 +2617,7 @@
                 <a:ea typeface="IBM Plex Sans" pitchFamily="34" charset="-122"/>
                 <a:cs typeface="IBM Plex Sans" pitchFamily="34" charset="-120"/>
               </a:rPr>
-              <a:t>Mistake: reporting only the row when the task asks where in the row it was too.</a:t>
+              <a:t>Common mistake: reporting only the row when the task asks where in the row it was too.</a:t>
             </a:r>
             <a:endParaRPr lang="en-US" sz="1700" dirty="0"/>
           </a:p>
@@ -7839,7 +7839,7 @@
                 <a:ea typeface="IBM Plex Sans" pitchFamily="34" charset="-122"/>
                 <a:cs typeface="IBM Plex Sans" pitchFamily="34" charset="-120"/>
               </a:rPr>
-              <a:t>Mistake: expecting len() on a grid to count the cells, when it counts the rows.</a:t>
+              <a:t>Common mistake: expecting len() on a grid to count the cells, when it counts the rows.</a:t>
             </a:r>
             <a:endParaRPr lang="en-US" sz="1700" dirty="0"/>
           </a:p>
@@ -8415,7 +8415,7 @@
                 <a:ea typeface="IBM Plex Sans" pitchFamily="34" charset="-122"/>
                 <a:cs typeface="IBM Plex Sans" pitchFamily="34" charset="-120"/>
               </a:rPr>
-              <a:t>Mistake: swapping the two indexes over, which reads a completely different cell.</a:t>
+              <a:t>Common mistake: swapping the two indexes over, which reads a completely different cell.</a:t>
             </a:r>
             <a:endParaRPr lang="en-US" sz="1700" dirty="0"/>
           </a:p>
@@ -8991,7 +8991,7 @@
                 <a:ea typeface="IBM Plex Sans" pitchFamily="34" charset="-122"/>
                 <a:cs typeface="IBM Plex Sans" pitchFamily="34" charset="-120"/>
               </a:rPr>
-              <a:t>Mistake: putting that new line inside the inner loop, which prints one value per line.</a:t>
+              <a:t>Common mistake: putting that new line inside the inner loop, which prints one value per line.</a:t>
             </a:r>
             <a:endParaRPr lang="en-US" sz="1700" dirty="0"/>
           </a:p>
@@ -9567,7 +9567,7 @@
                 <a:ea typeface="IBM Plex Sans" pitchFamily="34" charset="-122"/>
                 <a:cs typeface="IBM Plex Sans" pitchFamily="34" charset="-120"/>
               </a:rPr>
-              <a:t>Mistake: letting the row index change inside the loop, which totals the wrong cells.</a:t>
+              <a:t>Common mistake: letting the row index change inside the loop, which totals the wrong cells.</a:t>
             </a:r>
             <a:endParaRPr lang="en-US" sz="1700" dirty="0"/>
           </a:p>
@@ -10143,7 +10143,7 @@
                 <a:ea typeface="IBM Plex Sans" pitchFamily="34" charset="-122"/>
                 <a:cs typeface="IBM Plex Sans" pitchFamily="34" charset="-120"/>
               </a:rPr>
-              <a:t>Mistake: using the number of columns as the range when travelling down a column.</a:t>
+              <a:t>Common mistake: using the number of columns as the range when travelling down a column.</a:t>
             </a:r>
             <a:endParaRPr lang="en-US" sz="1700" dirty="0"/>
           </a:p>
